--- a/FINAL MY SELF.pptx
+++ b/FINAL MY SELF.pptx
@@ -5,17 +5,17 @@
     <p:sldMasterId id="2147483648" r:id="rId1"/>
   </p:sldMasterIdLst>
   <p:sldIdLst>
-    <p:sldId id="256" r:id="rId2"/>
-    <p:sldId id="257" r:id="rId3"/>
-    <p:sldId id="258" r:id="rId4"/>
-    <p:sldId id="259" r:id="rId5"/>
-    <p:sldId id="260" r:id="rId6"/>
-    <p:sldId id="261" r:id="rId7"/>
-    <p:sldId id="262" r:id="rId8"/>
-    <p:sldId id="263" r:id="rId9"/>
-    <p:sldId id="267" r:id="rId10"/>
-    <p:sldId id="265" r:id="rId11"/>
-    <p:sldId id="266" r:id="rId12"/>
+    <p:sldId id="256" r:id="rId3"/>
+    <p:sldId id="257" r:id="rId4"/>
+    <p:sldId id="258" r:id="rId5"/>
+    <p:sldId id="259" r:id="rId6"/>
+    <p:sldId id="260" r:id="rId7"/>
+    <p:sldId id="261" r:id="rId8"/>
+    <p:sldId id="262" r:id="rId9"/>
+    <p:sldId id="263" r:id="rId10"/>
+    <p:sldId id="267" r:id="rId11"/>
+    <p:sldId id="265" r:id="rId12"/>
+    <p:sldId id="266" r:id="rId13"/>
   </p:sldIdLst>
   <p:sldSz cx="12192000" cy="6858000"/>
   <p:notesSz cx="6858000" cy="9144000"/>
@@ -114,11 +114,6 @@
       </a:defRPr>
     </a:lvl9pPr>
   </p:defaultTextStyle>
-  <p:extLst>
-    <p:ext uri="{EFAFB233-063F-42B5-8137-9DF3F51BA10A}">
-      <p15:sldGuideLst xmlns:p15="http://schemas.microsoft.com/office/powerpoint/2012/main"/>
-    </p:ext>
-  </p:extLst>
 </p:presentation>
 </file>
 
@@ -310,7 +305,6 @@
           <a:p>
             <a:fld id="{2710D762-799C-40A4-9ADC-4838180CD810}" type="datetimeFigureOut">
               <a:rPr lang="en-US" smtClean="0"/>
-              <a:t>27-Sep-25</a:t>
             </a:fld>
             <a:endParaRPr lang="en-US"/>
           </a:p>
@@ -439,7 +433,6 @@
           <a:p>
             <a:fld id="{F34EC58E-E160-4EC3-BDBF-6BCBEAACD302}" type="slidenum">
               <a:rPr lang="en-US" smtClean="0"/>
-              <a:t>‹#›</a:t>
             </a:fld>
             <a:endParaRPr lang="en-US"/>
           </a:p>
@@ -623,6 +616,7 @@
               <a:rPr lang="en-US"/>
               <a:t>Click to edit Master text styles</a:t>
             </a:r>
+            <a:endParaRPr lang="en-US"/>
           </a:p>
         </p:txBody>
       </p:sp>
@@ -643,7 +637,6 @@
           <a:p>
             <a:fld id="{2710D762-799C-40A4-9ADC-4838180CD810}" type="datetimeFigureOut">
               <a:rPr lang="en-US" smtClean="0"/>
-              <a:t>27-Sep-25</a:t>
             </a:fld>
             <a:endParaRPr lang="en-US"/>
           </a:p>
@@ -772,7 +765,6 @@
           <a:p>
             <a:fld id="{F34EC58E-E160-4EC3-BDBF-6BCBEAACD302}" type="slidenum">
               <a:rPr lang="en-US" smtClean="0"/>
-              <a:t>‹#›</a:t>
             </a:fld>
             <a:endParaRPr lang="en-US"/>
           </a:p>
@@ -897,6 +889,7 @@
               <a:rPr lang="en-US"/>
               <a:t>Click to edit Master text styles</a:t>
             </a:r>
+            <a:endParaRPr lang="en-US"/>
           </a:p>
         </p:txBody>
       </p:sp>
@@ -1019,6 +1012,7 @@
               <a:rPr lang="en-US"/>
               <a:t>Click to edit Master text styles</a:t>
             </a:r>
+            <a:endParaRPr lang="en-US"/>
           </a:p>
         </p:txBody>
       </p:sp>
@@ -1039,7 +1033,6 @@
           <a:p>
             <a:fld id="{2710D762-799C-40A4-9ADC-4838180CD810}" type="datetimeFigureOut">
               <a:rPr lang="en-US" smtClean="0"/>
-              <a:t>27-Sep-25</a:t>
             </a:fld>
             <a:endParaRPr lang="en-US"/>
           </a:p>
@@ -1168,7 +1161,6 @@
           <a:p>
             <a:fld id="{F34EC58E-E160-4EC3-BDBF-6BCBEAACD302}" type="slidenum">
               <a:rPr lang="en-US" smtClean="0"/>
-              <a:t>‹#›</a:t>
             </a:fld>
             <a:endParaRPr lang="en-US"/>
           </a:p>
@@ -1209,6 +1201,16 @@
               </a:rPr>
               <a:t>“</a:t>
             </a:r>
+            <a:endParaRPr lang="en-US" sz="8000" baseline="0" dirty="0">
+              <a:ln w="3175" cmpd="sng">
+                <a:noFill/>
+              </a:ln>
+              <a:solidFill>
+                <a:schemeClr val="accent1"/>
+              </a:solidFill>
+              <a:effectLst/>
+              <a:latin typeface="Arial" panose="020B0604020202020204"/>
+            </a:endParaRPr>
           </a:p>
         </p:txBody>
       </p:sp>
@@ -1247,6 +1249,16 @@
               </a:rPr>
               <a:t>”</a:t>
             </a:r>
+            <a:endParaRPr lang="en-US" sz="8000" baseline="0" dirty="0">
+              <a:ln w="3175" cmpd="sng">
+                <a:noFill/>
+              </a:ln>
+              <a:solidFill>
+                <a:schemeClr val="accent1"/>
+              </a:solidFill>
+              <a:effectLst/>
+              <a:latin typeface="Arial" panose="020B0604020202020204"/>
+            </a:endParaRPr>
           </a:p>
         </p:txBody>
       </p:sp>
@@ -1350,6 +1362,7 @@
               <a:rPr lang="en-US"/>
               <a:t>Click to edit Master text styles</a:t>
             </a:r>
+            <a:endParaRPr lang="en-US"/>
           </a:p>
         </p:txBody>
       </p:sp>
@@ -1370,7 +1383,6 @@
           <a:p>
             <a:fld id="{2710D762-799C-40A4-9ADC-4838180CD810}" type="datetimeFigureOut">
               <a:rPr lang="en-US" smtClean="0"/>
-              <a:t>27-Sep-25</a:t>
             </a:fld>
             <a:endParaRPr lang="en-US"/>
           </a:p>
@@ -1499,7 +1511,6 @@
           <a:p>
             <a:fld id="{F34EC58E-E160-4EC3-BDBF-6BCBEAACD302}" type="slidenum">
               <a:rPr lang="en-US" smtClean="0"/>
-              <a:t>‹#›</a:t>
             </a:fld>
             <a:endParaRPr lang="en-US"/>
           </a:p>
@@ -1621,6 +1632,7 @@
               <a:rPr lang="en-US"/>
               <a:t>Click to edit Master text styles</a:t>
             </a:r>
+            <a:endParaRPr lang="en-US"/>
           </a:p>
         </p:txBody>
       </p:sp>
@@ -1665,6 +1677,7 @@
               <a:rPr lang="en-US"/>
               <a:t>Click to edit Master text styles</a:t>
             </a:r>
+            <a:endParaRPr lang="en-US"/>
           </a:p>
         </p:txBody>
       </p:sp>
@@ -1685,7 +1698,6 @@
           <a:p>
             <a:fld id="{2710D762-799C-40A4-9ADC-4838180CD810}" type="datetimeFigureOut">
               <a:rPr lang="en-US" smtClean="0"/>
-              <a:t>27-Sep-25</a:t>
             </a:fld>
             <a:endParaRPr lang="en-US"/>
           </a:p>
@@ -1814,7 +1826,6 @@
           <a:p>
             <a:fld id="{F34EC58E-E160-4EC3-BDBF-6BCBEAACD302}" type="slidenum">
               <a:rPr lang="en-US" smtClean="0"/>
-              <a:t>‹#›</a:t>
             </a:fld>
             <a:endParaRPr lang="en-US"/>
           </a:p>
@@ -1855,6 +1866,16 @@
               </a:rPr>
               <a:t>“</a:t>
             </a:r>
+            <a:endParaRPr lang="en-US" sz="8000" baseline="0" dirty="0">
+              <a:ln w="3175" cmpd="sng">
+                <a:noFill/>
+              </a:ln>
+              <a:solidFill>
+                <a:schemeClr val="accent1"/>
+              </a:solidFill>
+              <a:effectLst/>
+              <a:latin typeface="Arial" panose="020B0604020202020204"/>
+            </a:endParaRPr>
           </a:p>
         </p:txBody>
       </p:sp>
@@ -1893,6 +1914,16 @@
               </a:rPr>
               <a:t>”</a:t>
             </a:r>
+            <a:endParaRPr lang="en-US" sz="8000" baseline="0" dirty="0">
+              <a:ln w="3175" cmpd="sng">
+                <a:noFill/>
+              </a:ln>
+              <a:solidFill>
+                <a:schemeClr val="accent1"/>
+              </a:solidFill>
+              <a:effectLst/>
+              <a:latin typeface="Arial" panose="020B0604020202020204"/>
+            </a:endParaRPr>
           </a:p>
         </p:txBody>
       </p:sp>
@@ -2012,6 +2043,7 @@
               <a:rPr lang="en-US"/>
               <a:t>Click to edit Master text styles</a:t>
             </a:r>
+            <a:endParaRPr lang="en-US"/>
           </a:p>
         </p:txBody>
       </p:sp>
@@ -2056,6 +2088,7 @@
               <a:rPr lang="en-US"/>
               <a:t>Click to edit Master text styles</a:t>
             </a:r>
+            <a:endParaRPr lang="en-US"/>
           </a:p>
         </p:txBody>
       </p:sp>
@@ -2076,7 +2109,6 @@
           <a:p>
             <a:fld id="{2710D762-799C-40A4-9ADC-4838180CD810}" type="datetimeFigureOut">
               <a:rPr lang="en-US" smtClean="0"/>
-              <a:t>27-Sep-25</a:t>
             </a:fld>
             <a:endParaRPr lang="en-US"/>
           </a:p>
@@ -2205,7 +2237,6 @@
           <a:p>
             <a:fld id="{F34EC58E-E160-4EC3-BDBF-6BCBEAACD302}" type="slidenum">
               <a:rPr lang="en-US" smtClean="0"/>
-              <a:t>‹#›</a:t>
             </a:fld>
             <a:endParaRPr lang="en-US"/>
           </a:p>
@@ -2279,6 +2310,7 @@
               <a:rPr lang="en-US"/>
               <a:t>Click to edit Master text styles</a:t>
             </a:r>
+            <a:endParaRPr lang="en-US"/>
           </a:p>
           <a:p>
             <a:pPr lvl="1"/>
@@ -2286,6 +2318,7 @@
               <a:rPr lang="en-US"/>
               <a:t>Second level</a:t>
             </a:r>
+            <a:endParaRPr lang="en-US"/>
           </a:p>
           <a:p>
             <a:pPr lvl="2"/>
@@ -2293,6 +2326,7 @@
               <a:rPr lang="en-US"/>
               <a:t>Third level</a:t>
             </a:r>
+            <a:endParaRPr lang="en-US"/>
           </a:p>
           <a:p>
             <a:pPr lvl="3"/>
@@ -2300,6 +2334,7 @@
               <a:rPr lang="en-US"/>
               <a:t>Fourth level</a:t>
             </a:r>
+            <a:endParaRPr lang="en-US"/>
           </a:p>
           <a:p>
             <a:pPr lvl="4"/>
@@ -2328,7 +2363,6 @@
           <a:p>
             <a:fld id="{2710D762-799C-40A4-9ADC-4838180CD810}" type="datetimeFigureOut">
               <a:rPr lang="en-US" smtClean="0"/>
-              <a:t>27-Sep-25</a:t>
             </a:fld>
             <a:endParaRPr lang="en-US"/>
           </a:p>
@@ -2452,7 +2486,6 @@
           <a:p>
             <a:fld id="{F34EC58E-E160-4EC3-BDBF-6BCBEAACD302}" type="slidenum">
               <a:rPr lang="en-US" smtClean="0"/>
-              <a:t>‹#›</a:t>
             </a:fld>
             <a:endParaRPr lang="en-US"/>
           </a:p>
@@ -2536,6 +2569,7 @@
               <a:rPr lang="en-US"/>
               <a:t>Click to edit Master text styles</a:t>
             </a:r>
+            <a:endParaRPr lang="en-US"/>
           </a:p>
           <a:p>
             <a:pPr lvl="1"/>
@@ -2543,6 +2577,7 @@
               <a:rPr lang="en-US"/>
               <a:t>Second level</a:t>
             </a:r>
+            <a:endParaRPr lang="en-US"/>
           </a:p>
           <a:p>
             <a:pPr lvl="2"/>
@@ -2550,6 +2585,7 @@
               <a:rPr lang="en-US"/>
               <a:t>Third level</a:t>
             </a:r>
+            <a:endParaRPr lang="en-US"/>
           </a:p>
           <a:p>
             <a:pPr lvl="3"/>
@@ -2557,6 +2593,7 @@
               <a:rPr lang="en-US"/>
               <a:t>Fourth level</a:t>
             </a:r>
+            <a:endParaRPr lang="en-US"/>
           </a:p>
           <a:p>
             <a:pPr lvl="4"/>
@@ -2585,7 +2622,6 @@
           <a:p>
             <a:fld id="{2710D762-799C-40A4-9ADC-4838180CD810}" type="datetimeFigureOut">
               <a:rPr lang="en-US" smtClean="0"/>
-              <a:t>27-Sep-25</a:t>
             </a:fld>
             <a:endParaRPr lang="en-US"/>
           </a:p>
@@ -2709,7 +2745,6 @@
           <a:p>
             <a:fld id="{F34EC58E-E160-4EC3-BDBF-6BCBEAACD302}" type="slidenum">
               <a:rPr lang="en-US" smtClean="0"/>
-              <a:t>‹#›</a:t>
             </a:fld>
             <a:endParaRPr lang="en-US"/>
           </a:p>
@@ -2793,6 +2828,7 @@
               <a:rPr lang="en-US"/>
               <a:t>Click to edit Master text styles</a:t>
             </a:r>
+            <a:endParaRPr lang="en-US"/>
           </a:p>
           <a:p>
             <a:pPr lvl="1"/>
@@ -2800,6 +2836,7 @@
               <a:rPr lang="en-US"/>
               <a:t>Second level</a:t>
             </a:r>
+            <a:endParaRPr lang="en-US"/>
           </a:p>
           <a:p>
             <a:pPr lvl="2"/>
@@ -2807,6 +2844,7 @@
               <a:rPr lang="en-US"/>
               <a:t>Third level</a:t>
             </a:r>
+            <a:endParaRPr lang="en-US"/>
           </a:p>
           <a:p>
             <a:pPr lvl="3"/>
@@ -2814,6 +2852,7 @@
               <a:rPr lang="en-US"/>
               <a:t>Fourth level</a:t>
             </a:r>
+            <a:endParaRPr lang="en-US"/>
           </a:p>
           <a:p>
             <a:pPr lvl="4"/>
@@ -2842,7 +2881,6 @@
           <a:p>
             <a:fld id="{2710D762-799C-40A4-9ADC-4838180CD810}" type="datetimeFigureOut">
               <a:rPr lang="en-US" smtClean="0"/>
-              <a:t>27-Sep-25</a:t>
             </a:fld>
             <a:endParaRPr lang="en-US"/>
           </a:p>
@@ -2966,7 +3004,6 @@
           <a:p>
             <a:fld id="{F34EC58E-E160-4EC3-BDBF-6BCBEAACD302}" type="slidenum">
               <a:rPr lang="en-US" smtClean="0"/>
-              <a:t>‹#›</a:t>
             </a:fld>
             <a:endParaRPr lang="en-US"/>
           </a:p>
@@ -3146,6 +3183,7 @@
               <a:rPr lang="en-US"/>
               <a:t>Click to edit Master text styles</a:t>
             </a:r>
+            <a:endParaRPr lang="en-US"/>
           </a:p>
         </p:txBody>
       </p:sp>
@@ -3166,7 +3204,6 @@
           <a:p>
             <a:fld id="{2710D762-799C-40A4-9ADC-4838180CD810}" type="datetimeFigureOut">
               <a:rPr lang="en-US" smtClean="0"/>
-              <a:t>27-Sep-25</a:t>
             </a:fld>
             <a:endParaRPr lang="en-US"/>
           </a:p>
@@ -3295,7 +3332,6 @@
           <a:p>
             <a:fld id="{F34EC58E-E160-4EC3-BDBF-6BCBEAACD302}" type="slidenum">
               <a:rPr lang="en-US" smtClean="0"/>
-              <a:t>‹#›</a:t>
             </a:fld>
             <a:endParaRPr lang="en-US"/>
           </a:p>
@@ -3376,6 +3412,7 @@
               <a:rPr lang="en-US"/>
               <a:t>Click to edit Master text styles</a:t>
             </a:r>
+            <a:endParaRPr lang="en-US"/>
           </a:p>
           <a:p>
             <a:pPr lvl="1"/>
@@ -3383,6 +3420,7 @@
               <a:rPr lang="en-US"/>
               <a:t>Second level</a:t>
             </a:r>
+            <a:endParaRPr lang="en-US"/>
           </a:p>
           <a:p>
             <a:pPr lvl="2"/>
@@ -3390,6 +3428,7 @@
               <a:rPr lang="en-US"/>
               <a:t>Third level</a:t>
             </a:r>
+            <a:endParaRPr lang="en-US"/>
           </a:p>
           <a:p>
             <a:pPr lvl="3"/>
@@ -3397,6 +3436,7 @@
               <a:rPr lang="en-US"/>
               <a:t>Fourth level</a:t>
             </a:r>
+            <a:endParaRPr lang="en-US"/>
           </a:p>
           <a:p>
             <a:pPr lvl="4"/>
@@ -3435,6 +3475,7 @@
               <a:rPr lang="en-US"/>
               <a:t>Click to edit Master text styles</a:t>
             </a:r>
+            <a:endParaRPr lang="en-US"/>
           </a:p>
           <a:p>
             <a:pPr lvl="1"/>
@@ -3442,6 +3483,7 @@
               <a:rPr lang="en-US"/>
               <a:t>Second level</a:t>
             </a:r>
+            <a:endParaRPr lang="en-US"/>
           </a:p>
           <a:p>
             <a:pPr lvl="2"/>
@@ -3449,6 +3491,7 @@
               <a:rPr lang="en-US"/>
               <a:t>Third level</a:t>
             </a:r>
+            <a:endParaRPr lang="en-US"/>
           </a:p>
           <a:p>
             <a:pPr lvl="3"/>
@@ -3456,6 +3499,7 @@
               <a:rPr lang="en-US"/>
               <a:t>Fourth level</a:t>
             </a:r>
+            <a:endParaRPr lang="en-US"/>
           </a:p>
           <a:p>
             <a:pPr lvl="4"/>
@@ -3484,7 +3528,6 @@
           <a:p>
             <a:fld id="{2710D762-799C-40A4-9ADC-4838180CD810}" type="datetimeFigureOut">
               <a:rPr lang="en-US" smtClean="0"/>
-              <a:t>27-Sep-25</a:t>
             </a:fld>
             <a:endParaRPr lang="en-US"/>
           </a:p>
@@ -3613,7 +3656,6 @@
           <a:p>
             <a:fld id="{F34EC58E-E160-4EC3-BDBF-6BCBEAACD302}" type="slidenum">
               <a:rPr lang="en-US" smtClean="0"/>
-              <a:t>‹#›</a:t>
             </a:fld>
             <a:endParaRPr lang="en-US"/>
           </a:p>
@@ -3731,6 +3773,7 @@
               <a:rPr lang="en-US"/>
               <a:t>Click to edit Master text styles</a:t>
             </a:r>
+            <a:endParaRPr lang="en-US"/>
           </a:p>
         </p:txBody>
       </p:sp>
@@ -3761,6 +3804,7 @@
               <a:rPr lang="en-US"/>
               <a:t>Click to edit Master text styles</a:t>
             </a:r>
+            <a:endParaRPr lang="en-US"/>
           </a:p>
           <a:p>
             <a:pPr lvl="1"/>
@@ -3768,6 +3812,7 @@
               <a:rPr lang="en-US"/>
               <a:t>Second level</a:t>
             </a:r>
+            <a:endParaRPr lang="en-US"/>
           </a:p>
           <a:p>
             <a:pPr lvl="2"/>
@@ -3775,6 +3820,7 @@
               <a:rPr lang="en-US"/>
               <a:t>Third level</a:t>
             </a:r>
+            <a:endParaRPr lang="en-US"/>
           </a:p>
           <a:p>
             <a:pPr lvl="3"/>
@@ -3782,6 +3828,7 @@
               <a:rPr lang="en-US"/>
               <a:t>Fourth level</a:t>
             </a:r>
+            <a:endParaRPr lang="en-US"/>
           </a:p>
           <a:p>
             <a:pPr lvl="4"/>
@@ -3857,6 +3904,7 @@
               <a:rPr lang="en-US"/>
               <a:t>Click to edit Master text styles</a:t>
             </a:r>
+            <a:endParaRPr lang="en-US"/>
           </a:p>
         </p:txBody>
       </p:sp>
@@ -3887,6 +3935,7 @@
               <a:rPr lang="en-US"/>
               <a:t>Click to edit Master text styles</a:t>
             </a:r>
+            <a:endParaRPr lang="en-US"/>
           </a:p>
           <a:p>
             <a:pPr lvl="1"/>
@@ -3894,6 +3943,7 @@
               <a:rPr lang="en-US"/>
               <a:t>Second level</a:t>
             </a:r>
+            <a:endParaRPr lang="en-US"/>
           </a:p>
           <a:p>
             <a:pPr lvl="2"/>
@@ -3901,6 +3951,7 @@
               <a:rPr lang="en-US"/>
               <a:t>Third level</a:t>
             </a:r>
+            <a:endParaRPr lang="en-US"/>
           </a:p>
           <a:p>
             <a:pPr lvl="3"/>
@@ -3908,6 +3959,7 @@
               <a:rPr lang="en-US"/>
               <a:t>Fourth level</a:t>
             </a:r>
+            <a:endParaRPr lang="en-US"/>
           </a:p>
           <a:p>
             <a:pPr lvl="4"/>
@@ -3936,7 +3988,6 @@
           <a:p>
             <a:fld id="{2710D762-799C-40A4-9ADC-4838180CD810}" type="datetimeFigureOut">
               <a:rPr lang="en-US" smtClean="0"/>
-              <a:t>27-Sep-25</a:t>
             </a:fld>
             <a:endParaRPr lang="en-US"/>
           </a:p>
@@ -4065,7 +4116,6 @@
           <a:p>
             <a:fld id="{F34EC58E-E160-4EC3-BDBF-6BCBEAACD302}" type="slidenum">
               <a:rPr lang="en-US" smtClean="0"/>
-              <a:t>‹#›</a:t>
             </a:fld>
             <a:endParaRPr lang="en-US"/>
           </a:p>
@@ -4136,7 +4186,6 @@
           <a:p>
             <a:fld id="{2710D762-799C-40A4-9ADC-4838180CD810}" type="datetimeFigureOut">
               <a:rPr lang="en-US" smtClean="0"/>
-              <a:t>27-Sep-25</a:t>
             </a:fld>
             <a:endParaRPr lang="en-US"/>
           </a:p>
@@ -4260,7 +4309,6 @@
           <a:p>
             <a:fld id="{F34EC58E-E160-4EC3-BDBF-6BCBEAACD302}" type="slidenum">
               <a:rPr lang="en-US" smtClean="0"/>
-              <a:t>‹#›</a:t>
             </a:fld>
             <a:endParaRPr lang="en-US"/>
           </a:p>
@@ -4308,7 +4356,6 @@
           <a:p>
             <a:fld id="{2710D762-799C-40A4-9ADC-4838180CD810}" type="datetimeFigureOut">
               <a:rPr lang="en-US" smtClean="0"/>
-              <a:t>27-Sep-25</a:t>
             </a:fld>
             <a:endParaRPr lang="en-US"/>
           </a:p>
@@ -4432,7 +4479,6 @@
           <a:p>
             <a:fld id="{F34EC58E-E160-4EC3-BDBF-6BCBEAACD302}" type="slidenum">
               <a:rPr lang="en-US" smtClean="0"/>
-              <a:t>‹#›</a:t>
             </a:fld>
             <a:endParaRPr lang="en-US"/>
           </a:p>
@@ -4522,6 +4568,7 @@
               <a:rPr lang="en-US"/>
               <a:t>Click to edit Master text styles</a:t>
             </a:r>
+            <a:endParaRPr lang="en-US"/>
           </a:p>
           <a:p>
             <a:pPr lvl="1"/>
@@ -4529,6 +4576,7 @@
               <a:rPr lang="en-US"/>
               <a:t>Second level</a:t>
             </a:r>
+            <a:endParaRPr lang="en-US"/>
           </a:p>
           <a:p>
             <a:pPr lvl="2"/>
@@ -4536,6 +4584,7 @@
               <a:rPr lang="en-US"/>
               <a:t>Third level</a:t>
             </a:r>
+            <a:endParaRPr lang="en-US"/>
           </a:p>
           <a:p>
             <a:pPr lvl="3"/>
@@ -4543,6 +4592,7 @@
               <a:rPr lang="en-US"/>
               <a:t>Fourth level</a:t>
             </a:r>
+            <a:endParaRPr lang="en-US"/>
           </a:p>
           <a:p>
             <a:pPr lvl="4"/>
@@ -4616,6 +4666,7 @@
               <a:rPr lang="en-US"/>
               <a:t>Click to edit Master text styles</a:t>
             </a:r>
+            <a:endParaRPr lang="en-US"/>
           </a:p>
         </p:txBody>
       </p:sp>
@@ -4636,7 +4687,6 @@
           <a:p>
             <a:fld id="{2710D762-799C-40A4-9ADC-4838180CD810}" type="datetimeFigureOut">
               <a:rPr lang="en-US" smtClean="0"/>
-              <a:t>27-Sep-25</a:t>
             </a:fld>
             <a:endParaRPr lang="en-US"/>
           </a:p>
@@ -4760,7 +4810,6 @@
           <a:p>
             <a:fld id="{F34EC58E-E160-4EC3-BDBF-6BCBEAACD302}" type="slidenum">
               <a:rPr lang="en-US" smtClean="0"/>
-              <a:t>‹#›</a:t>
             </a:fld>
             <a:endParaRPr lang="en-US"/>
           </a:p>
@@ -4956,6 +5005,7 @@
               <a:rPr lang="en-US"/>
               <a:t>Click to edit Master text styles</a:t>
             </a:r>
+            <a:endParaRPr lang="en-US"/>
           </a:p>
         </p:txBody>
       </p:sp>
@@ -4976,7 +5026,6 @@
           <a:p>
             <a:fld id="{2710D762-799C-40A4-9ADC-4838180CD810}" type="datetimeFigureOut">
               <a:rPr lang="en-US" smtClean="0"/>
-              <a:t>27-Sep-25</a:t>
             </a:fld>
             <a:endParaRPr lang="en-US"/>
           </a:p>
@@ -5105,7 +5154,6 @@
           <a:p>
             <a:fld id="{F34EC58E-E160-4EC3-BDBF-6BCBEAACD302}" type="slidenum">
               <a:rPr lang="en-US" smtClean="0"/>
-              <a:t>‹#›</a:t>
             </a:fld>
             <a:endParaRPr lang="en-US"/>
           </a:p>
@@ -7021,6 +7069,7 @@
               <a:rPr lang="en-US"/>
               <a:t>Click to edit Master text styles</a:t>
             </a:r>
+            <a:endParaRPr lang="en-US"/>
           </a:p>
           <a:p>
             <a:pPr lvl="1"/>
@@ -7028,6 +7077,7 @@
               <a:rPr lang="en-US"/>
               <a:t>Second level</a:t>
             </a:r>
+            <a:endParaRPr lang="en-US"/>
           </a:p>
           <a:p>
             <a:pPr lvl="2"/>
@@ -7035,6 +7085,7 @@
               <a:rPr lang="en-US"/>
               <a:t>Third level</a:t>
             </a:r>
+            <a:endParaRPr lang="en-US"/>
           </a:p>
           <a:p>
             <a:pPr lvl="3"/>
@@ -7042,6 +7093,7 @@
               <a:rPr lang="en-US"/>
               <a:t>Fourth level</a:t>
             </a:r>
+            <a:endParaRPr lang="en-US"/>
           </a:p>
           <a:p>
             <a:pPr lvl="4"/>
@@ -7088,7 +7140,6 @@
           <a:p>
             <a:fld id="{2710D762-799C-40A4-9ADC-4838180CD810}" type="datetimeFigureOut">
               <a:rPr lang="en-US" smtClean="0"/>
-              <a:t>27-Sep-25</a:t>
             </a:fld>
             <a:endParaRPr lang="en-US"/>
           </a:p>
@@ -7164,7 +7215,6 @@
           <a:p>
             <a:fld id="{F34EC58E-E160-4EC3-BDBF-6BCBEAACD302}" type="slidenum">
               <a:rPr lang="en-US" smtClean="0"/>
-              <a:t>‹#›</a:t>
             </a:fld>
             <a:endParaRPr lang="en-US"/>
           </a:p>
@@ -7624,6 +7674,11 @@
               </a:rPr>
               <a:t>FINAL PROJECT</a:t>
             </a:r>
+            <a:endParaRPr lang="en-US" b="1" dirty="0">
+              <a:solidFill>
+                <a:schemeClr val="accent3"/>
+              </a:solidFill>
+            </a:endParaRPr>
           </a:p>
         </p:txBody>
       </p:sp>
@@ -7654,6 +7709,12 @@
               </a:rPr>
               <a:t>SELF-PRESENTATION</a:t>
             </a:r>
+            <a:endParaRPr lang="en-US" sz="2800" b="1" i="1" dirty="0">
+              <a:solidFill>
+                <a:schemeClr val="accent3"/>
+              </a:solidFill>
+              <a:latin typeface="Arial Black" panose="020B0A04020102020204" pitchFamily="34" charset="0"/>
+            </a:endParaRPr>
           </a:p>
         </p:txBody>
       </p:sp>
@@ -7674,14 +7735,7 @@
         <p:cNvGrpSpPr/>
         <p:nvPr/>
       </p:nvGrpSpPr>
-      <p:grpSpPr>
-        <a:xfrm>
-          <a:off x="0" y="0"/>
-          <a:ext cx="0" cy="0"/>
-          <a:chOff x="0" y="0"/>
-          <a:chExt cx="0" cy="0"/>
-        </a:xfrm>
-      </p:grpSpPr>
+      <p:grpSpPr/>
       <p:sp>
         <p:nvSpPr>
           <p:cNvPr id="2" name="Title 1"/>
@@ -7695,7 +7749,6 @@
         <p:spPr/>
         <p:txBody>
           <a:bodyPr anchor="ctr" anchorCtr="0"/>
-          <a:lstStyle/>
           <a:p>
             <a:pPr fontAlgn="ctr"/>
             <a:r>
@@ -7709,6 +7762,10 @@
               </a:rPr>
               <a:t>FUN FACT :</a:t>
             </a:r>
+            <a:endParaRPr lang="en-US" sz="2800">
+              <a:latin typeface="Arial Black" panose="020B0A04020102020204" pitchFamily="34" charset="0"/>
+              <a:cs typeface="Arial Black" panose="020B0A04020102020204" pitchFamily="34" charset="0"/>
+            </a:endParaRPr>
           </a:p>
         </p:txBody>
       </p:sp>
@@ -7725,7 +7782,6 @@
         <p:spPr/>
         <p:txBody>
           <a:bodyPr/>
-          <a:lstStyle/>
           <a:p>
             <a:pPr fontAlgn="ctr"/>
             <a:r>
@@ -7735,6 +7791,10 @@
               </a:rPr>
               <a:t>A fun fact about me is that I never miss a cricket match of my favourite team, no matter how busy I am! I also enjoy collecting cricket facts and sharing them with my friends.</a:t>
             </a:r>
+            <a:endParaRPr lang="en-US" altLang="en-US" sz="2000">
+              <a:latin typeface="Times New Roman" panose="02020603050405020304" charset="0"/>
+              <a:cs typeface="Times New Roman" panose="02020603050405020304" charset="0"/>
+            </a:endParaRPr>
           </a:p>
         </p:txBody>
       </p:sp>
@@ -7755,14 +7815,7 @@
         <p:cNvGrpSpPr/>
         <p:nvPr/>
       </p:nvGrpSpPr>
-      <p:grpSpPr>
-        <a:xfrm>
-          <a:off x="0" y="0"/>
-          <a:ext cx="0" cy="0"/>
-          <a:chOff x="0" y="0"/>
-          <a:chExt cx="0" cy="0"/>
-        </a:xfrm>
-      </p:grpSpPr>
+      <p:grpSpPr/>
       <p:sp>
         <p:nvSpPr>
           <p:cNvPr id="2" name="Title 1"/>
@@ -7781,7 +7834,6 @@
         </p:spPr>
         <p:txBody>
           <a:bodyPr/>
-          <a:lstStyle/>
           <a:p>
             <a:pPr algn="ctr"/>
             <a:r>
@@ -7791,6 +7843,10 @@
               </a:rPr>
               <a:t>THANK YOU</a:t>
             </a:r>
+            <a:endParaRPr lang="en-US" sz="9600">
+              <a:latin typeface="Arial Black" panose="020B0A04020102020204" pitchFamily="34" charset="0"/>
+              <a:cs typeface="Arial Black" panose="020B0A04020102020204" pitchFamily="34" charset="0"/>
+            </a:endParaRPr>
           </a:p>
         </p:txBody>
       </p:sp>
@@ -7854,6 +7910,10 @@
               </a:rPr>
               <a:t>:</a:t>
             </a:r>
+            <a:endParaRPr lang="en-US" b="1" i="1" dirty="0">
+              <a:latin typeface="Arial Black" panose="020B0A04020102020204" pitchFamily="34" charset="0"/>
+              <a:cs typeface="Arial Black" panose="020B0A04020102020204" pitchFamily="34" charset="0"/>
+            </a:endParaRPr>
           </a:p>
         </p:txBody>
       </p:sp>
@@ -7888,6 +7948,10 @@
               </a:rPr>
               <a:t>My Name Is Hamza Aftab.</a:t>
             </a:r>
+            <a:endParaRPr lang="en-US" sz="2000" dirty="0">
+              <a:latin typeface="Times New Roman" panose="02020603050405020304" charset="0"/>
+              <a:cs typeface="Times New Roman" panose="02020603050405020304" charset="0"/>
+            </a:endParaRPr>
           </a:p>
           <a:p>
             <a:pPr fontAlgn="ctr">
@@ -7901,6 +7965,10 @@
               </a:rPr>
               <a:t>My Country Name Is Pakistan.</a:t>
             </a:r>
+            <a:endParaRPr lang="en-US" sz="2000" dirty="0">
+              <a:latin typeface="Times New Roman" panose="02020603050405020304" charset="0"/>
+              <a:cs typeface="Times New Roman" panose="02020603050405020304" charset="0"/>
+            </a:endParaRPr>
           </a:p>
           <a:p>
             <a:pPr fontAlgn="ctr">
@@ -7914,6 +7982,10 @@
               </a:rPr>
               <a:t>I Live In Karachi.</a:t>
             </a:r>
+            <a:endParaRPr lang="en-US" sz="2000" dirty="0">
+              <a:latin typeface="Times New Roman" panose="02020603050405020304" charset="0"/>
+              <a:cs typeface="Times New Roman" panose="02020603050405020304" charset="0"/>
+            </a:endParaRPr>
           </a:p>
           <a:p>
             <a:pPr fontAlgn="ctr">
@@ -7927,6 +7999,10 @@
               </a:rPr>
               <a:t>My Religion  Is Islam.</a:t>
             </a:r>
+            <a:endParaRPr lang="en-US" sz="2000" dirty="0">
+              <a:latin typeface="Times New Roman" panose="02020603050405020304" charset="0"/>
+              <a:cs typeface="Times New Roman" panose="02020603050405020304" charset="0"/>
+            </a:endParaRPr>
           </a:p>
           <a:p>
             <a:pPr fontAlgn="ctr">
@@ -7940,6 +8016,10 @@
               </a:rPr>
               <a:t>I Am A Student Of Karachi University.</a:t>
             </a:r>
+            <a:endParaRPr lang="en-US" sz="2000" dirty="0">
+              <a:latin typeface="Times New Roman" panose="02020603050405020304" charset="0"/>
+              <a:cs typeface="Times New Roman" panose="02020603050405020304" charset="0"/>
+            </a:endParaRPr>
           </a:p>
           <a:p>
             <a:pPr fontAlgn="ctr">
@@ -7967,6 +8047,10 @@
               </a:rPr>
               <a:t> Part-1.</a:t>
             </a:r>
+            <a:endParaRPr lang="en-US" sz="2000" dirty="0">
+              <a:latin typeface="Times New Roman" panose="02020603050405020304" charset="0"/>
+              <a:cs typeface="Times New Roman" panose="02020603050405020304" charset="0"/>
+            </a:endParaRPr>
           </a:p>
           <a:p>
             <a:pPr fontAlgn="ctr">
@@ -7980,6 +8064,10 @@
               </a:rPr>
               <a:t>I Am 25 Year Old.</a:t>
             </a:r>
+            <a:endParaRPr lang="en-US" sz="2000" dirty="0">
+              <a:latin typeface="Times New Roman" panose="02020603050405020304" charset="0"/>
+              <a:cs typeface="Times New Roman" panose="02020603050405020304" charset="0"/>
+            </a:endParaRPr>
           </a:p>
         </p:txBody>
       </p:sp>
@@ -8003,7 +8091,6 @@
           <a:bodyPr wrap="square" rtlCol="0">
             <a:spAutoFit/>
           </a:bodyPr>
-          <a:lstStyle/>
           <a:p>
             <a:endParaRPr lang="en-US"/>
           </a:p>
@@ -8061,6 +8148,10 @@
               </a:rPr>
               <a:t>Personality Traits : </a:t>
             </a:r>
+            <a:endParaRPr lang="en-US" sz="2800" i="1" dirty="0">
+              <a:latin typeface="Arial Black" panose="020B0A04020102020204" pitchFamily="34" charset="0"/>
+              <a:cs typeface="Arial Black" panose="020B0A04020102020204" pitchFamily="34" charset="0"/>
+            </a:endParaRPr>
           </a:p>
         </p:txBody>
       </p:sp>
@@ -8091,6 +8182,10 @@
               </a:rPr>
               <a:t>I am hardworking, curious, and a team player. I enjoy solving problems and learning new technologies.</a:t>
             </a:r>
+            <a:endParaRPr lang="en-US" sz="2000" dirty="0">
+              <a:latin typeface="Times New Roman" panose="02020603050405020304" charset="0"/>
+              <a:cs typeface="Times New Roman" panose="02020603050405020304" charset="0"/>
+            </a:endParaRPr>
           </a:p>
         </p:txBody>
       </p:sp>
@@ -8139,6 +8234,7 @@
               <a:rPr lang="en-US" b="1" i="1"/>
               <a:t>Hobbies &amp; Interests :</a:t>
             </a:r>
+            <a:endParaRPr lang="en-US" b="1" i="1"/>
           </a:p>
         </p:txBody>
       </p:sp>
@@ -8165,6 +8261,10 @@
               </a:rPr>
               <a:t>MY  HOBBIES INCLUDE TO PLAY CRICKET &amp; RECITING HOLY QURAN. MY INTEREST IS UP TO DATE WITH NEW TREND &amp; TECHNOLOGIES </a:t>
             </a:r>
+            <a:endParaRPr lang="en-US">
+              <a:latin typeface="Times New Roman" panose="02020603050405020304" charset="0"/>
+              <a:cs typeface="Times New Roman" panose="02020603050405020304" charset="0"/>
+            </a:endParaRPr>
           </a:p>
         </p:txBody>
       </p:sp>
@@ -8220,6 +8320,7 @@
               <a:rPr lang="en-US" sz="3110" b="1" i="1"/>
               <a:t>ACHIEVEMENTS:</a:t>
             </a:r>
+            <a:endParaRPr lang="en-US" sz="3110" b="1" i="1"/>
           </a:p>
         </p:txBody>
       </p:sp>
@@ -8249,6 +8350,10 @@
               </a:rPr>
               <a:t>CONSENSUS CERTIFICATE OF HAFIZ -- UI- QURAN</a:t>
             </a:r>
+            <a:endParaRPr lang="en-US" sz="2000">
+              <a:latin typeface="Times New Roman" panose="02020603050405020304" charset="0"/>
+              <a:cs typeface="Times New Roman" panose="02020603050405020304" charset="0"/>
+            </a:endParaRPr>
           </a:p>
           <a:p>
             <a:pPr fontAlgn="ctr">
@@ -8262,6 +8367,10 @@
               </a:rPr>
               <a:t>CERTIFICATE IN HIGHEST MARKS IN MATHEMATICS</a:t>
             </a:r>
+            <a:endParaRPr lang="en-US" sz="2000">
+              <a:latin typeface="Times New Roman" panose="02020603050405020304" charset="0"/>
+              <a:cs typeface="Times New Roman" panose="02020603050405020304" charset="0"/>
+            </a:endParaRPr>
           </a:p>
         </p:txBody>
       </p:sp>
@@ -8320,6 +8429,10 @@
               </a:rPr>
               <a:t>STRENGTHS&amp;WEAKNESSES :</a:t>
             </a:r>
+            <a:endParaRPr lang="en-US" sz="2800" b="1" i="1">
+              <a:latin typeface="Arial Black" panose="020B0A04020102020204" pitchFamily="34" charset="0"/>
+              <a:cs typeface="Arial Black" panose="020B0A04020102020204" pitchFamily="34" charset="0"/>
+            </a:endParaRPr>
           </a:p>
         </p:txBody>
       </p:sp>
@@ -8349,6 +8462,10 @@
               </a:rPr>
               <a:t>ADAPTABILITY</a:t>
             </a:r>
+            <a:endParaRPr lang="en-US" sz="2000">
+              <a:latin typeface="Times New Roman" panose="02020603050405020304" charset="0"/>
+              <a:cs typeface="Times New Roman" panose="02020603050405020304" charset="0"/>
+            </a:endParaRPr>
           </a:p>
           <a:p>
             <a:pPr fontAlgn="ctr">
@@ -8362,6 +8479,10 @@
               </a:rPr>
               <a:t>PROBLEM SOLVING SKILLS</a:t>
             </a:r>
+            <a:endParaRPr lang="en-US" sz="2000">
+              <a:latin typeface="Times New Roman" panose="02020603050405020304" charset="0"/>
+              <a:cs typeface="Times New Roman" panose="02020603050405020304" charset="0"/>
+            </a:endParaRPr>
           </a:p>
           <a:p>
             <a:pPr fontAlgn="ctr">
@@ -8375,6 +8496,10 @@
               </a:rPr>
               <a:t>TIME MANAGEMENT</a:t>
             </a:r>
+            <a:endParaRPr lang="en-US" sz="2000">
+              <a:latin typeface="Times New Roman" panose="02020603050405020304" charset="0"/>
+              <a:cs typeface="Times New Roman" panose="02020603050405020304" charset="0"/>
+            </a:endParaRPr>
           </a:p>
           <a:p>
             <a:pPr fontAlgn="ctr">
@@ -8388,6 +8513,10 @@
               </a:rPr>
               <a:t>LEARNING AGILITY</a:t>
             </a:r>
+            <a:endParaRPr lang="en-US" sz="2000">
+              <a:latin typeface="Times New Roman" panose="02020603050405020304" charset="0"/>
+              <a:cs typeface="Times New Roman" panose="02020603050405020304" charset="0"/>
+            </a:endParaRPr>
           </a:p>
         </p:txBody>
       </p:sp>
@@ -8424,6 +8553,10 @@
               </a:rPr>
               <a:t>TRUSTINGTO MUCH PEOPLE BLINDLY</a:t>
             </a:r>
+            <a:endParaRPr lang="en-US" sz="2000">
+              <a:latin typeface="Times New Roman" panose="02020603050405020304" charset="0"/>
+              <a:cs typeface="Times New Roman" panose="02020603050405020304" charset="0"/>
+            </a:endParaRPr>
           </a:p>
           <a:p>
             <a:pPr algn="l" fontAlgn="ctr">
@@ -8437,6 +8570,10 @@
               </a:rPr>
               <a:t>PERFETIONISM</a:t>
             </a:r>
+            <a:endParaRPr lang="en-US" sz="2000">
+              <a:latin typeface="Times New Roman" panose="02020603050405020304" charset="0"/>
+              <a:cs typeface="Times New Roman" panose="02020603050405020304" charset="0"/>
+            </a:endParaRPr>
           </a:p>
         </p:txBody>
       </p:sp>
@@ -8457,14 +8594,7 @@
         <p:cNvGrpSpPr/>
         <p:nvPr/>
       </p:nvGrpSpPr>
-      <p:grpSpPr>
-        <a:xfrm>
-          <a:off x="0" y="0"/>
-          <a:ext cx="0" cy="0"/>
-          <a:chOff x="0" y="0"/>
-          <a:chExt cx="0" cy="0"/>
-        </a:xfrm>
-      </p:grpSpPr>
+      <p:grpSpPr/>
       <p:sp>
         <p:nvSpPr>
           <p:cNvPr id="5" name="Title 4"/>
@@ -8478,7 +8608,6 @@
         <p:spPr/>
         <p:txBody>
           <a:bodyPr anchor="ctr" anchorCtr="0"/>
-          <a:lstStyle/>
           <a:p>
             <a:pPr fontAlgn="ctr"/>
             <a:r>
@@ -8488,6 +8617,10 @@
               </a:rPr>
               <a:t>SKILLS LEARNED FROM THIS COUERSE :</a:t>
             </a:r>
+            <a:endParaRPr lang="en-US" sz="2800" b="1" i="1">
+              <a:latin typeface="Arial Black" panose="020B0A04020102020204" pitchFamily="34" charset="0"/>
+              <a:cs typeface="Arial Black" panose="020B0A04020102020204" pitchFamily="34" charset="0"/>
+            </a:endParaRPr>
           </a:p>
         </p:txBody>
       </p:sp>
@@ -8504,7 +8637,6 @@
         <p:spPr/>
         <p:txBody>
           <a:bodyPr/>
-          <a:lstStyle/>
           <a:p>
             <a:pPr fontAlgn="ctr"/>
             <a:r>
@@ -8514,6 +8646,10 @@
               </a:rPr>
               <a:t>THROUGH THIS COURSE, I AM DEVELOPING FOUNDATIONAL SKILLS IN COMPUTER FUNDAMENTALS LIKE MS WORD, MS EXCEL,  MS POWER POINT THAT ENHANCE MY TECHNICAL PROFICIENCY IN USING IT TOOLS AND SYSTEMS.</a:t>
             </a:r>
+            <a:endParaRPr lang="en-US" sz="2000">
+              <a:latin typeface="Times New Roman" panose="02020603050405020304" charset="0"/>
+              <a:cs typeface="Times New Roman" panose="02020603050405020304" charset="0"/>
+            </a:endParaRPr>
           </a:p>
         </p:txBody>
       </p:sp>
@@ -8534,14 +8670,7 @@
         <p:cNvGrpSpPr/>
         <p:nvPr/>
       </p:nvGrpSpPr>
-      <p:grpSpPr>
-        <a:xfrm>
-          <a:off x="0" y="0"/>
-          <a:ext cx="0" cy="0"/>
-          <a:chOff x="0" y="0"/>
-          <a:chExt cx="0" cy="0"/>
-        </a:xfrm>
-      </p:grpSpPr>
+      <p:grpSpPr/>
       <p:sp>
         <p:nvSpPr>
           <p:cNvPr id="2" name="Title 1"/>
@@ -8562,7 +8691,6 @@
           <a:bodyPr anchor="ctr" anchorCtr="0">
             <a:noAutofit/>
           </a:bodyPr>
-          <a:lstStyle/>
           <a:p>
             <a:pPr fontAlgn="ctr"/>
             <a:r>
@@ -8572,6 +8700,10 @@
               </a:rPr>
               <a:t>FAVORITE TOPIC:</a:t>
             </a:r>
+            <a:endParaRPr lang="en-US" sz="2800" b="1" i="1">
+              <a:latin typeface="Arial Black" panose="020B0A04020102020204" pitchFamily="34" charset="0"/>
+              <a:cs typeface="Arial Black" panose="020B0A04020102020204" pitchFamily="34" charset="0"/>
+            </a:endParaRPr>
           </a:p>
         </p:txBody>
       </p:sp>
@@ -8588,7 +8720,6 @@
         <p:spPr/>
         <p:txBody>
           <a:bodyPr/>
-          <a:lstStyle/>
           <a:p>
             <a:pPr fontAlgn="ctr"/>
             <a:r>
@@ -8598,6 +8729,10 @@
               </a:rPr>
               <a:t>My favourite topic is cricket because it is not just a game, but a passion for millions of people around the world. I enjoy watching and playing cricket, as it teaches team work, discipline, and patience. The excitement of batting, bowling, and fielding makes it an interesting and challenging sport.</a:t>
             </a:r>
+            <a:endParaRPr lang="en-US" altLang="en-US" sz="2000">
+              <a:latin typeface="Times New Roman" panose="02020603050405020304" charset="0"/>
+              <a:cs typeface="Times New Roman" panose="02020603050405020304" charset="0"/>
+            </a:endParaRPr>
           </a:p>
         </p:txBody>
       </p:sp>
@@ -8618,14 +8753,7 @@
         <p:cNvGrpSpPr/>
         <p:nvPr/>
       </p:nvGrpSpPr>
-      <p:grpSpPr>
-        <a:xfrm>
-          <a:off x="0" y="0"/>
-          <a:ext cx="0" cy="0"/>
-          <a:chOff x="0" y="0"/>
-          <a:chExt cx="0" cy="0"/>
-        </a:xfrm>
-      </p:grpSpPr>
+      <p:grpSpPr/>
       <p:sp>
         <p:nvSpPr>
           <p:cNvPr id="9" name="Title 8"/>
@@ -8641,7 +8769,6 @@
           <a:bodyPr anchor="ctr" anchorCtr="0">
             <a:normAutofit/>
           </a:bodyPr>
-          <a:lstStyle/>
           <a:p>
             <a:pPr fontAlgn="ctr"/>
             <a:r>
@@ -8669,7 +8796,6 @@
         <p:spPr/>
         <p:txBody>
           <a:bodyPr/>
-          <a:lstStyle/>
           <a:p>
             <a:pPr fontAlgn="ctr">
               <a:buFont typeface="Wingdings" panose="05000000000000000000" charset="0"/>
@@ -8737,7 +8863,6 @@
           <a:bodyPr>
             <a:normAutofit lnSpcReduction="20000"/>
           </a:bodyPr>
-          <a:lstStyle/>
           <a:p>
             <a:pPr>
               <a:buFont typeface="Wingdings" panose="05000000000000000000" charset="0"/>
@@ -9025,8 +9150,6 @@
       </a:bgFillStyleLst>
     </a:fmtScheme>
   </a:themeElements>
-  <a:objectDefaults/>
-  <a:extraClrSchemeLst/>
   <a:extLst>
     <a:ext uri="{05A4C25C-085E-4340-85A3-A5531E510DB2}">
       <thm15:themeFamily xmlns:thm15="http://schemas.microsoft.com/office/thememl/2012/main" name="Office Theme" id="{62F939B6-93AF-4DB8-9C6B-D6C7DFDC589F}" vid="{4A3C46E8-61CC-4603-A589-7422A47A8E4A}"/>
